--- a/assets/pptx/catalog-336.pptx
+++ b/assets/pptx/catalog-336.pptx
@@ -3471,7 +3471,7 @@
                 <a:ea typeface="Ebrima"/>
                 <a:cs typeface="Ebrima"/>
               </a:rPr>
-              <a:t>ክበር (3x) የእኔ ጌታ ንገስ (3x) የእኔ ጌታ ክበር (3x) የእኔ ጌታ ንገስ (3x) የእኔ ጌታ</a:t>
+              <a:t>ክበር 3x የእኔ ጌታ ንገስ 3x የእኔ ጌታ ክበር 3x የእኔ ጌታ ንገስ 3x የእኔ ጌታ</a:t>
             </a:r>
           </a:p>
         </p:txBody>
@@ -3806,7 +3806,7 @@
                 <a:ea typeface="Ebrima"/>
                 <a:cs typeface="Ebrima"/>
               </a:rPr>
-              <a:t>ክበር (3x) የእኔ ጌታ ንገስ (3x) የእኔ ጌታ ክበር (3x) የእኔ ጌታ ንገስ (3x) የእኔ ጌታ</a:t>
+              <a:t>ክበር 3x የእኔ ጌታ ንገስ 3x የእኔ ጌታ ክበር 3x የእኔ ጌታ ንገስ 3x የእኔ ጌታ</a:t>
             </a:r>
           </a:p>
         </p:txBody>
@@ -4208,7 +4208,7 @@
                 <a:ea typeface="Ebrima"/>
                 <a:cs typeface="Ebrima"/>
               </a:rPr>
-              <a:t>ክበር (3x) የእኔ ጌታ ንገስ (3x) የእኔ ጌታ ክበር (3x) የእኔ ጌታ ንገስ (3x) የእኔ ጌታ</a:t>
+              <a:t>ክበር 3x የእኔ ጌታ ንገስ 3x የእኔ ጌታ ክበር 3x የእኔ ጌታ ንገስ 3x የእኔ ጌታ</a:t>
             </a:r>
           </a:p>
         </p:txBody>
@@ -4275,7 +4275,7 @@
                 <a:ea typeface="Ebrima"/>
                 <a:cs typeface="Ebrima"/>
               </a:rPr>
-              <a:t>የምቆጥበው የምሰስተው ክብር የለኝም ሁሉ የአንተ ነው (2x)</a:t>
+              <a:t>የምቆጥበው የምሰስተው ክብር የለኝም ሁሉ የአንተ ነው 2x</a:t>
             </a:r>
           </a:p>
         </p:txBody>
@@ -4342,7 +4342,7 @@
                 <a:ea typeface="Ebrima"/>
                 <a:cs typeface="Ebrima"/>
               </a:rPr>
-              <a:t>ክበር (3x) የእኔ ጌታ ንገስ (3x) የእኔ ጌታ</a:t>
+              <a:t>ክበር 3x የእኔ ጌታ ንገስ 3x የእኔ ጌታ</a:t>
             </a:r>
           </a:p>
         </p:txBody>
@@ -4610,7 +4610,7 @@
                 <a:ea typeface="Ebrima"/>
                 <a:cs typeface="Ebrima"/>
               </a:rPr>
-              <a:t>በብዙ ዓይነት ግጥም በብዙ ዓይነት (2x)</a:t>
+              <a:t>በብዙ ዓይነት ግጥም በብዙ ዓይነት 2x</a:t>
             </a:r>
           </a:p>
         </p:txBody>
@@ -4744,7 +4744,7 @@
                 <a:ea typeface="Ebrima"/>
                 <a:cs typeface="Ebrima"/>
               </a:rPr>
-              <a:t>ባመሰግንህ ይበቃል አልልም እንዲያንስህ አውቃለው ይህ ለአንተ ትንሽ ነው (4x)</a:t>
+              <a:t>ባመሰግንህ ይበቃል አልልም እንዲያንስህ አውቃለው ይህ ለአንተ ትንሽ ነው 4x</a:t>
             </a:r>
           </a:p>
         </p:txBody>
@@ -4811,7 +4811,7 @@
                 <a:ea typeface="Ebrima"/>
                 <a:cs typeface="Ebrima"/>
               </a:rPr>
-              <a:t>ይህ ለአንተ ትንሽ ነው (10x)</a:t>
+              <a:t>ይህ ለአንተ ትንሽ ነው 10x</a:t>
             </a:r>
           </a:p>
         </p:txBody>
@@ -5012,7 +5012,7 @@
                 <a:ea typeface="Ebrima"/>
                 <a:cs typeface="Ebrima"/>
               </a:rPr>
-              <a:t>ክበር (3x) የእኔ ጌታ ንገስ (3x) የእኔ ጌታ ክበር (3x) የእኔ ጌታ ንገስ (3x) የእኔ ጌታ</a:t>
+              <a:t>ክበር 3x የእኔ ጌታ ንገስ 3x የእኔ ጌታ ክበር 3x የእኔ ጌታ ንገስ 3x የእኔ ጌታ</a:t>
             </a:r>
           </a:p>
         </p:txBody>
@@ -5079,7 +5079,7 @@
                 <a:ea typeface="Ebrima"/>
                 <a:cs typeface="Ebrima"/>
               </a:rPr>
-              <a:t>የምቆጥበው የምሰስተው ክብር የለኝም ሁሉ የአንተ ነው (2x)</a:t>
+              <a:t>የምቆጥበው የምሰስተው ክብር የለኝም ሁሉ የአንተ ነው 2x</a:t>
             </a:r>
           </a:p>
         </p:txBody>
@@ -5146,7 +5146,7 @@
                 <a:ea typeface="Ebrima"/>
                 <a:cs typeface="Ebrima"/>
               </a:rPr>
-              <a:t>ክበር (3x) የእኔ ጌታ ንገስ (3x) የእኔ ጌታ</a:t>
+              <a:t>ክበር 3x የእኔ ጌታ ንገስ 3x የእኔ ጌታ</a:t>
             </a:r>
           </a:p>
         </p:txBody>
